--- a/deck/Ergonomic_Risk_Factor_Prediction_Project_Plan_Final.pptx
+++ b/deck/Ergonomic_Risk_Factor_Prediction_Project_Plan_Final.pptx
@@ -40,11 +40,10 @@
     <p:sldId id="272" r:id="rId34"/>
     <p:sldId id="293" r:id="rId35"/>
     <p:sldId id="273" r:id="rId36"/>
-    <p:sldId id="274" r:id="rId37"/>
-    <p:sldId id="302" r:id="rId38"/>
-    <p:sldId id="295" r:id="rId39"/>
-    <p:sldId id="275" r:id="rId40"/>
-    <p:sldId id="301" r:id="rId41"/>
+    <p:sldId id="302" r:id="rId37"/>
+    <p:sldId id="295" r:id="rId38"/>
+    <p:sldId id="275" r:id="rId39"/>
+    <p:sldId id="301" r:id="rId40"/>
   </p:sldIdLst>
   <p:sldSz cx="12192000" cy="6858000"/>
   <p:notesSz cx="6858000" cy="9144000"/>
@@ -341,7 +340,7 @@
           <a:p>
             <a:fld id="{5BCAD085-E8A6-8845-BD4E-CB4CCA059FC4}" type="datetimeFigureOut">
               <a:rPr lang="en-US" smtClean="0"/>
-              <a:t>22-May-26</a:t>
+              <a:t>27-May-26</a:t>
             </a:fld>
             <a:endParaRPr lang="en-US"/>
           </a:p>
@@ -509,7 +508,7 @@
           <a:p>
             <a:fld id="{5BCAD085-E8A6-8845-BD4E-CB4CCA059FC4}" type="datetimeFigureOut">
               <a:rPr lang="en-US" smtClean="0"/>
-              <a:t>22-May-26</a:t>
+              <a:t>27-May-26</a:t>
             </a:fld>
             <a:endParaRPr lang="en-US"/>
           </a:p>
@@ -687,7 +686,7 @@
           <a:p>
             <a:fld id="{5BCAD085-E8A6-8845-BD4E-CB4CCA059FC4}" type="datetimeFigureOut">
               <a:rPr lang="en-US" smtClean="0"/>
-              <a:t>22-May-26</a:t>
+              <a:t>27-May-26</a:t>
             </a:fld>
             <a:endParaRPr lang="en-US"/>
           </a:p>
@@ -857,7 +856,7 @@
           <a:p>
             <a:fld id="{5BCAD085-E8A6-8845-BD4E-CB4CCA059FC4}" type="datetimeFigureOut">
               <a:rPr lang="en-US" smtClean="0"/>
-              <a:t>22-May-26</a:t>
+              <a:t>27-May-26</a:t>
             </a:fld>
             <a:endParaRPr lang="en-US"/>
           </a:p>
@@ -1131,7 +1130,7 @@
           <a:p>
             <a:fld id="{5BCAD085-E8A6-8845-BD4E-CB4CCA059FC4}" type="datetimeFigureOut">
               <a:rPr lang="en-US" smtClean="0"/>
-              <a:t>22-May-26</a:t>
+              <a:t>27-May-26</a:t>
             </a:fld>
             <a:endParaRPr lang="en-US"/>
           </a:p>
@@ -1416,7 +1415,7 @@
           <a:p>
             <a:fld id="{5BCAD085-E8A6-8845-BD4E-CB4CCA059FC4}" type="datetimeFigureOut">
               <a:rPr lang="en-US" smtClean="0"/>
-              <a:t>22-May-26</a:t>
+              <a:t>27-May-26</a:t>
             </a:fld>
             <a:endParaRPr lang="en-US"/>
           </a:p>
@@ -1835,7 +1834,7 @@
           <a:p>
             <a:fld id="{5BCAD085-E8A6-8845-BD4E-CB4CCA059FC4}" type="datetimeFigureOut">
               <a:rPr lang="en-US" smtClean="0"/>
-              <a:t>22-May-26</a:t>
+              <a:t>27-May-26</a:t>
             </a:fld>
             <a:endParaRPr lang="en-US"/>
           </a:p>
@@ -1952,7 +1951,7 @@
           <a:p>
             <a:fld id="{5BCAD085-E8A6-8845-BD4E-CB4CCA059FC4}" type="datetimeFigureOut">
               <a:rPr lang="en-US" smtClean="0"/>
-              <a:t>22-May-26</a:t>
+              <a:t>27-May-26</a:t>
             </a:fld>
             <a:endParaRPr lang="en-US"/>
           </a:p>
@@ -2047,7 +2046,7 @@
           <a:p>
             <a:fld id="{5BCAD085-E8A6-8845-BD4E-CB4CCA059FC4}" type="datetimeFigureOut">
               <a:rPr lang="en-US" smtClean="0"/>
-              <a:t>22-May-26</a:t>
+              <a:t>27-May-26</a:t>
             </a:fld>
             <a:endParaRPr lang="en-US"/>
           </a:p>
@@ -2322,7 +2321,7 @@
           <a:p>
             <a:fld id="{5BCAD085-E8A6-8845-BD4E-CB4CCA059FC4}" type="datetimeFigureOut">
               <a:rPr lang="en-US" smtClean="0"/>
-              <a:t>22-May-26</a:t>
+              <a:t>27-May-26</a:t>
             </a:fld>
             <a:endParaRPr lang="en-US"/>
           </a:p>
@@ -2574,7 +2573,7 @@
           <a:p>
             <a:fld id="{5BCAD085-E8A6-8845-BD4E-CB4CCA059FC4}" type="datetimeFigureOut">
               <a:rPr lang="en-US" smtClean="0"/>
-              <a:t>22-May-26</a:t>
+              <a:t>27-May-26</a:t>
             </a:fld>
             <a:endParaRPr lang="en-US"/>
           </a:p>
@@ -2785,7 +2784,7 @@
           <a:p>
             <a:fld id="{5BCAD085-E8A6-8845-BD4E-CB4CCA059FC4}" type="datetimeFigureOut">
               <a:rPr lang="en-US" smtClean="0"/>
-              <a:t>22-May-26</a:t>
+              <a:t>27-May-26</a:t>
             </a:fld>
             <a:endParaRPr lang="en-US"/>
           </a:p>
@@ -3187,6 +3186,79 @@
           </a:p>
         </p:txBody>
       </p:sp>
+      <p:sp>
+        <p:nvSpPr>
+          <p:cNvPr id="3" name="Title 1">
+            <a:extLst>
+              <a:ext uri="{FF2B5EF4-FFF2-40B4-BE49-F238E27FC236}">
+                <a16:creationId xmlns:a16="http://schemas.microsoft.com/office/drawing/2014/main" id="{E22E4782-CCEA-0B60-CCA4-E864703A78B1}"/>
+              </a:ext>
+            </a:extLst>
+          </p:cNvPr>
+          <p:cNvSpPr txBox="1">
+            <a:spLocks/>
+          </p:cNvSpPr>
+          <p:nvPr/>
+        </p:nvSpPr>
+        <p:spPr>
+          <a:xfrm>
+            <a:off x="9086088" y="5249924"/>
+            <a:ext cx="3395472" cy="1470025"/>
+          </a:xfrm>
+          <a:prstGeom prst="rect">
+            <a:avLst/>
+          </a:prstGeom>
+        </p:spPr>
+        <p:txBody>
+          <a:bodyPr vert="horz" lIns="91440" tIns="45720" rIns="91440" bIns="45720" rtlCol="0" anchor="ctr">
+            <a:normAutofit fontScale="62500" lnSpcReduction="20000"/>
+          </a:bodyPr>
+          <a:lstStyle>
+            <a:lvl1pPr algn="ctr" defTabSz="457200" rtl="0" eaLnBrk="1" latinLnBrk="0" hangingPunct="1">
+              <a:spcBef>
+                <a:spcPct val="0"/>
+              </a:spcBef>
+              <a:buNone/>
+              <a:defRPr sz="4400" kern="1200">
+                <a:solidFill>
+                  <a:schemeClr val="tx1"/>
+                </a:solidFill>
+                <a:latin typeface="+mj-lt"/>
+                <a:ea typeface="+mj-ea"/>
+                <a:cs typeface="+mj-cs"/>
+              </a:defRPr>
+            </a:lvl1pPr>
+          </a:lstStyle>
+          <a:p>
+            <a:pPr algn="l"/>
+            <a:r>
+              <a:rPr lang="en-US" b="1" dirty="0"/>
+              <a:t>By</a:t>
+            </a:r>
+          </a:p>
+          <a:p>
+            <a:pPr algn="l"/>
+            <a:r>
+              <a:rPr lang="en-US" dirty="0"/>
+              <a:t>Aila Vishnu Vardhan</a:t>
+            </a:r>
+          </a:p>
+          <a:p>
+            <a:pPr algn="l"/>
+            <a:r>
+              <a:rPr lang="en-US" dirty="0"/>
+              <a:t>23911A6702</a:t>
+            </a:r>
+          </a:p>
+          <a:p>
+            <a:pPr algn="l"/>
+            <a:r>
+              <a:rPr lang="en-US" dirty="0"/>
+              <a:t>VJIT</a:t>
+            </a:r>
+          </a:p>
+        </p:txBody>
+      </p:sp>
     </p:spTree>
   </p:cSld>
   <p:clrMapOvr>
@@ -3281,13 +3353,13 @@
           <a:p>
             <a:r>
               <a:rPr dirty="0"/>
-              <a:t>Predict Awkward Posture Risk</a:t>
+              <a:t>Predict Posture Risk</a:t>
             </a:r>
           </a:p>
           <a:p>
             <a:r>
               <a:rPr dirty="0"/>
-              <a:t>Predict Static Posture Risk</a:t>
+              <a:t>Predict Duration Risk</a:t>
             </a:r>
           </a:p>
           <a:p>
@@ -5528,12 +5600,8 @@
           <a:lstStyle/>
           <a:p>
             <a:r>
-              <a:rPr lang="en-IN" dirty="0" err="1"/>
-              <a:t>Analyze</a:t>
-            </a:r>
-            <a:r>
               <a:rPr lang="en-IN" dirty="0"/>
-              <a:t> workload, posture, fatigue, and ergonomic exposure among delivery riders</a:t>
+              <a:t>Analyse workload, posture, fatigue, and ergonomic exposure among delivery riders</a:t>
             </a:r>
           </a:p>
           <a:p>
@@ -8077,13 +8145,13 @@
           <a:p>
             <a:r>
               <a:rPr dirty="0"/>
-              <a:t>Predict Awkward Posture Risk</a:t>
+              <a:t>Predict Posture Risk</a:t>
             </a:r>
           </a:p>
           <a:p>
             <a:r>
               <a:rPr dirty="0"/>
-              <a:t>Predict Static Posture Risk</a:t>
+              <a:t>Predict Duration Risk</a:t>
             </a:r>
           </a:p>
           <a:p>
@@ -8469,248 +8537,6 @@
   <p:cSld>
     <p:spTree>
       <p:nvGrpSpPr>
-        <p:cNvPr id="1" name=""/>
-        <p:cNvGrpSpPr/>
-        <p:nvPr/>
-      </p:nvGrpSpPr>
-      <p:grpSpPr>
-        <a:xfrm>
-          <a:off x="0" y="0"/>
-          <a:ext cx="0" cy="0"/>
-          <a:chOff x="0" y="0"/>
-          <a:chExt cx="0" cy="0"/>
-        </a:xfrm>
-      </p:grpSpPr>
-      <p:sp>
-        <p:nvSpPr>
-          <p:cNvPr id="2" name="Title 1"/>
-          <p:cNvSpPr>
-            <a:spLocks noGrp="1"/>
-          </p:cNvSpPr>
-          <p:nvPr>
-            <p:ph type="title"/>
-          </p:nvPr>
-        </p:nvSpPr>
-        <p:spPr/>
-        <p:txBody>
-          <a:bodyPr/>
-          <a:lstStyle/>
-          <a:p>
-            <a:r>
-              <a:rPr lang="en-IN" dirty="0"/>
-              <a:t>Inputs &amp; Outputs</a:t>
-            </a:r>
-            <a:endParaRPr dirty="0"/>
-          </a:p>
-        </p:txBody>
-      </p:sp>
-      <p:sp>
-        <p:nvSpPr>
-          <p:cNvPr id="3" name="Content Placeholder 2"/>
-          <p:cNvSpPr>
-            <a:spLocks noGrp="1"/>
-          </p:cNvSpPr>
-          <p:nvPr>
-            <p:ph idx="1"/>
-          </p:nvPr>
-        </p:nvSpPr>
-        <p:spPr>
-          <a:xfrm>
-            <a:off x="609600" y="1600200"/>
-            <a:ext cx="6972300" cy="4525963"/>
-          </a:xfrm>
-        </p:spPr>
-        <p:txBody>
-          <a:bodyPr>
-            <a:noAutofit/>
-          </a:bodyPr>
-          <a:lstStyle/>
-          <a:p>
-            <a:r>
-              <a:rPr lang="en-US" sz="2000" b="1" dirty="0"/>
-              <a:t>Input Variables:</a:t>
-            </a:r>
-          </a:p>
-          <a:p>
-            <a:pPr marL="0" indent="0">
-              <a:buNone/>
-            </a:pPr>
-            <a:r>
-              <a:rPr lang="en-US" sz="2000" dirty="0"/>
-              <a:t>- workload scores</a:t>
-            </a:r>
-          </a:p>
-          <a:p>
-            <a:pPr marL="0" indent="0">
-              <a:buNone/>
-            </a:pPr>
-            <a:r>
-              <a:rPr lang="en-US" sz="2000" dirty="0"/>
-              <a:t>- fatigue scores</a:t>
-            </a:r>
-          </a:p>
-          <a:p>
-            <a:pPr marL="0" indent="0">
-              <a:buNone/>
-            </a:pPr>
-            <a:r>
-              <a:rPr lang="en-US" sz="2000" dirty="0"/>
-              <a:t>- work hours</a:t>
-            </a:r>
-          </a:p>
-          <a:p>
-            <a:pPr marL="0" indent="0">
-              <a:buNone/>
-            </a:pPr>
-            <a:r>
-              <a:rPr lang="en-US" sz="2000" dirty="0"/>
-              <a:t>- riding duration</a:t>
-            </a:r>
-          </a:p>
-          <a:p>
-            <a:pPr marL="0" indent="0">
-              <a:buNone/>
-            </a:pPr>
-            <a:r>
-              <a:rPr lang="en-US" sz="2000" dirty="0"/>
-              <a:t>- posture scores</a:t>
-            </a:r>
-          </a:p>
-          <a:p>
-            <a:pPr marL="0" indent="0">
-              <a:buNone/>
-            </a:pPr>
-            <a:r>
-              <a:rPr lang="en-US" sz="2000" dirty="0"/>
-              <a:t>- delivery frequency</a:t>
-            </a:r>
-          </a:p>
-          <a:p>
-            <a:pPr marL="0" indent="0">
-              <a:buNone/>
-            </a:pPr>
-            <a:r>
-              <a:rPr lang="en-US" sz="2000" dirty="0"/>
-              <a:t>- vibration exposure</a:t>
-            </a:r>
-          </a:p>
-          <a:p>
-            <a:pPr marL="0" indent="0">
-              <a:buNone/>
-            </a:pPr>
-            <a:r>
-              <a:rPr lang="en-US" sz="2000" dirty="0"/>
-              <a:t>- discomfort indicators</a:t>
-            </a:r>
-          </a:p>
-        </p:txBody>
-      </p:sp>
-      <p:sp>
-        <p:nvSpPr>
-          <p:cNvPr id="5" name="TextBox 4">
-            <a:extLst>
-              <a:ext uri="{FF2B5EF4-FFF2-40B4-BE49-F238E27FC236}">
-                <a16:creationId xmlns:a16="http://schemas.microsoft.com/office/drawing/2014/main" id="{BCA6534E-3BE5-E9B2-C09F-0078D1896653}"/>
-              </a:ext>
-            </a:extLst>
-          </p:cNvPr>
-          <p:cNvSpPr txBox="1"/>
-          <p:nvPr/>
-        </p:nvSpPr>
-        <p:spPr>
-          <a:xfrm>
-            <a:off x="6375400" y="1665625"/>
-            <a:ext cx="6096000" cy="2031325"/>
-          </a:xfrm>
-          <a:prstGeom prst="rect">
-            <a:avLst/>
-          </a:prstGeom>
-          <a:noFill/>
-        </p:spPr>
-        <p:txBody>
-          <a:bodyPr wrap="square">
-            <a:spAutoFit/>
-          </a:bodyPr>
-          <a:lstStyle/>
-          <a:p>
-            <a:pPr marL="285750" indent="-285750">
-              <a:buFont typeface="Arial" panose="020B0604020202020204" pitchFamily="34" charset="0"/>
-              <a:buChar char="•"/>
-            </a:pPr>
-            <a:r>
-              <a:rPr lang="en-US" sz="1800" b="1" dirty="0"/>
-              <a:t>Prediction Outputs:</a:t>
-            </a:r>
-          </a:p>
-          <a:p>
-            <a:pPr marL="0" indent="0">
-              <a:buNone/>
-            </a:pPr>
-            <a:r>
-              <a:rPr lang="en-US" sz="1800" dirty="0"/>
-              <a:t>- Force Risk</a:t>
-            </a:r>
-          </a:p>
-          <a:p>
-            <a:pPr marL="0" indent="0">
-              <a:buNone/>
-            </a:pPr>
-            <a:r>
-              <a:rPr lang="en-US" sz="1800" dirty="0"/>
-              <a:t>- Repetition Risk</a:t>
-            </a:r>
-          </a:p>
-          <a:p>
-            <a:pPr marL="0" indent="0">
-              <a:buNone/>
-            </a:pPr>
-            <a:r>
-              <a:rPr lang="en-US" sz="1800" dirty="0"/>
-              <a:t>- Static Posture Risk</a:t>
-            </a:r>
-          </a:p>
-          <a:p>
-            <a:pPr marL="0" indent="0">
-              <a:buNone/>
-            </a:pPr>
-            <a:r>
-              <a:rPr lang="en-US" sz="1800" dirty="0"/>
-              <a:t>- Contact Stress Risk</a:t>
-            </a:r>
-          </a:p>
-          <a:p>
-            <a:pPr marL="0" indent="0">
-              <a:buNone/>
-            </a:pPr>
-            <a:r>
-              <a:rPr lang="en-US" sz="1800" dirty="0"/>
-              <a:t>- Vibration Risk</a:t>
-            </a:r>
-          </a:p>
-          <a:p>
-            <a:pPr marL="0" indent="0">
-              <a:buNone/>
-            </a:pPr>
-            <a:r>
-              <a:rPr lang="en-US" sz="1800" dirty="0"/>
-              <a:t>- Awkward Posture Risk</a:t>
-            </a:r>
-          </a:p>
-        </p:txBody>
-      </p:sp>
-    </p:spTree>
-  </p:cSld>
-  <p:clrMapOvr>
-    <a:masterClrMapping/>
-  </p:clrMapOvr>
-</p:sld>
-</file>
-
-<file path=ppt/slides/slide37.xml><?xml version="1.0" encoding="utf-8"?>
-<p:sld xmlns:a="http://schemas.openxmlformats.org/drawingml/2006/main" xmlns:r="http://schemas.openxmlformats.org/officeDocument/2006/relationships" xmlns:p="http://schemas.openxmlformats.org/presentationml/2006/main">
-  <p:cSld>
-    <p:spTree>
-      <p:nvGrpSpPr>
         <p:cNvPr id="1" name="">
           <a:extLst>
             <a:ext uri="{FF2B5EF4-FFF2-40B4-BE49-F238E27FC236}">
@@ -8820,13 +8646,8 @@
             </a:pPr>
             <a:r>
               <a:rPr lang="en-US" sz="2000" dirty="0"/>
-              <a:t>- work hours = </a:t>
-            </a:r>
-            <a:r>
-              <a:rPr lang="en-IN" sz="2000" dirty="0"/>
-              <a:t>Working Hours per Day"</a:t>
-            </a:r>
-            <a:endParaRPr lang="en-US" sz="2000" dirty="0"/>
+              <a:t>- work hours = Working Hours per Day</a:t>
+            </a:r>
           </a:p>
           <a:p>
             <a:pPr marL="0" indent="0">
@@ -8843,13 +8664,8 @@
             </a:pPr>
             <a:r>
               <a:rPr lang="en-US" sz="2000" dirty="0"/>
-              <a:t>- posture scores = </a:t>
-            </a:r>
-            <a:r>
-              <a:rPr lang="en-IN" sz="2000" dirty="0"/>
-              <a:t>RULA</a:t>
-            </a:r>
-            <a:endParaRPr lang="en-US" sz="2000" dirty="0"/>
+              <a:t>- posture scores = RULA &amp; QEC</a:t>
+            </a:r>
           </a:p>
           <a:p>
             <a:pPr marL="0" indent="0">
@@ -8867,15 +8683,6 @@
             <a:r>
               <a:rPr lang="en-US" sz="2000" dirty="0"/>
               <a:t>- vibration exposure = "Type of vehicle" + "Working Hours"</a:t>
-            </a:r>
-          </a:p>
-          <a:p>
-            <a:pPr marL="0" indent="0">
-              <a:buNone/>
-            </a:pPr>
-            <a:r>
-              <a:rPr lang="en-US" sz="2000" dirty="0"/>
-              <a:t>- discomfort indicators = Nordic pain columns (12-mo + 7-day) </a:t>
             </a:r>
           </a:p>
         </p:txBody>
@@ -8941,7 +8748,7 @@
             </a:pPr>
             <a:r>
               <a:rPr lang="en-US" sz="1800" dirty="0"/>
-              <a:t>- Static Posture Risk</a:t>
+              <a:t>- Duration Risk</a:t>
             </a:r>
           </a:p>
           <a:p>
@@ -8968,7 +8775,7 @@
             </a:pPr>
             <a:r>
               <a:rPr lang="en-US" sz="1800" dirty="0"/>
-              <a:t>- Awkward Posture Risk</a:t>
+              <a:t>- Posture Risk</a:t>
             </a:r>
           </a:p>
         </p:txBody>
@@ -8986,7 +8793,7 @@
 </p:sld>
 </file>
 
-<file path=ppt/slides/slide38.xml><?xml version="1.0" encoding="utf-8"?>
+<file path=ppt/slides/slide37.xml><?xml version="1.0" encoding="utf-8"?>
 <p:sld xmlns:a="http://schemas.openxmlformats.org/drawingml/2006/main" xmlns:r="http://schemas.openxmlformats.org/officeDocument/2006/relationships" xmlns:p="http://schemas.openxmlformats.org/presentationml/2006/main">
   <p:cSld>
     <p:spTree>
@@ -9139,7 +8946,7 @@
 </p:sld>
 </file>
 
-<file path=ppt/slides/slide39.xml><?xml version="1.0" encoding="utf-8"?>
+<file path=ppt/slides/slide38.xml><?xml version="1.0" encoding="utf-8"?>
 <p:sld xmlns:a="http://schemas.openxmlformats.org/drawingml/2006/main" xmlns:r="http://schemas.openxmlformats.org/officeDocument/2006/relationships" xmlns:p="http://schemas.openxmlformats.org/presentationml/2006/main">
   <p:cSld>
     <p:spTree>
@@ -9230,6 +9037,77 @@
         </p:txBody>
       </p:sp>
     </p:spTree>
+  </p:cSld>
+  <p:clrMapOvr>
+    <a:masterClrMapping/>
+  </p:clrMapOvr>
+</p:sld>
+</file>
+
+<file path=ppt/slides/slide39.xml><?xml version="1.0" encoding="utf-8"?>
+<p:sld xmlns:a="http://schemas.openxmlformats.org/drawingml/2006/main" xmlns:r="http://schemas.openxmlformats.org/officeDocument/2006/relationships" xmlns:p="http://schemas.openxmlformats.org/presentationml/2006/main">
+  <p:cSld>
+    <p:spTree>
+      <p:nvGrpSpPr>
+        <p:cNvPr id="1" name="">
+          <a:extLst>
+            <a:ext uri="{FF2B5EF4-FFF2-40B4-BE49-F238E27FC236}">
+              <a16:creationId xmlns:a16="http://schemas.microsoft.com/office/drawing/2014/main" id="{D37942D0-0D70-589E-4C8C-483BF92661B5}"/>
+            </a:ext>
+          </a:extLst>
+        </p:cNvPr>
+        <p:cNvGrpSpPr/>
+        <p:nvPr/>
+      </p:nvGrpSpPr>
+      <p:grpSpPr>
+        <a:xfrm>
+          <a:off x="0" y="0"/>
+          <a:ext cx="0" cy="0"/>
+          <a:chOff x="0" y="0"/>
+          <a:chExt cx="0" cy="0"/>
+        </a:xfrm>
+      </p:grpSpPr>
+      <p:sp>
+        <p:nvSpPr>
+          <p:cNvPr id="2" name="Title 1">
+            <a:extLst>
+              <a:ext uri="{FF2B5EF4-FFF2-40B4-BE49-F238E27FC236}">
+                <a16:creationId xmlns:a16="http://schemas.microsoft.com/office/drawing/2014/main" id="{9C745776-0702-1FE3-1C3F-291E63955224}"/>
+              </a:ext>
+            </a:extLst>
+          </p:cNvPr>
+          <p:cNvSpPr>
+            <a:spLocks noGrp="1"/>
+          </p:cNvSpPr>
+          <p:nvPr>
+            <p:ph type="title"/>
+          </p:nvPr>
+        </p:nvSpPr>
+        <p:spPr>
+          <a:xfrm>
+            <a:off x="4774063" y="2857500"/>
+            <a:ext cx="2643873" cy="1143000"/>
+          </a:xfrm>
+        </p:spPr>
+        <p:txBody>
+          <a:bodyPr/>
+          <a:lstStyle/>
+          <a:p>
+            <a:pPr algn="ctr"/>
+            <a:r>
+              <a:rPr lang="en-US" dirty="0"/>
+              <a:t>Thank You</a:t>
+            </a:r>
+            <a:endParaRPr dirty="0"/>
+          </a:p>
+        </p:txBody>
+      </p:sp>
+    </p:spTree>
+    <p:extLst>
+      <p:ext uri="{BB962C8B-B14F-4D97-AF65-F5344CB8AC3E}">
+        <p14:creationId xmlns:p14="http://schemas.microsoft.com/office/powerpoint/2010/main" val="2503925356"/>
+      </p:ext>
+    </p:extLst>
   </p:cSld>
   <p:clrMapOvr>
     <a:masterClrMapping/>
@@ -9358,77 +9236,6 @@
         </p:txBody>
       </p:sp>
     </p:spTree>
-  </p:cSld>
-  <p:clrMapOvr>
-    <a:masterClrMapping/>
-  </p:clrMapOvr>
-</p:sld>
-</file>
-
-<file path=ppt/slides/slide40.xml><?xml version="1.0" encoding="utf-8"?>
-<p:sld xmlns:a="http://schemas.openxmlformats.org/drawingml/2006/main" xmlns:r="http://schemas.openxmlformats.org/officeDocument/2006/relationships" xmlns:p="http://schemas.openxmlformats.org/presentationml/2006/main">
-  <p:cSld>
-    <p:spTree>
-      <p:nvGrpSpPr>
-        <p:cNvPr id="1" name="">
-          <a:extLst>
-            <a:ext uri="{FF2B5EF4-FFF2-40B4-BE49-F238E27FC236}">
-              <a16:creationId xmlns:a16="http://schemas.microsoft.com/office/drawing/2014/main" id="{D37942D0-0D70-589E-4C8C-483BF92661B5}"/>
-            </a:ext>
-          </a:extLst>
-        </p:cNvPr>
-        <p:cNvGrpSpPr/>
-        <p:nvPr/>
-      </p:nvGrpSpPr>
-      <p:grpSpPr>
-        <a:xfrm>
-          <a:off x="0" y="0"/>
-          <a:ext cx="0" cy="0"/>
-          <a:chOff x="0" y="0"/>
-          <a:chExt cx="0" cy="0"/>
-        </a:xfrm>
-      </p:grpSpPr>
-      <p:sp>
-        <p:nvSpPr>
-          <p:cNvPr id="2" name="Title 1">
-            <a:extLst>
-              <a:ext uri="{FF2B5EF4-FFF2-40B4-BE49-F238E27FC236}">
-                <a16:creationId xmlns:a16="http://schemas.microsoft.com/office/drawing/2014/main" id="{9C745776-0702-1FE3-1C3F-291E63955224}"/>
-              </a:ext>
-            </a:extLst>
-          </p:cNvPr>
-          <p:cNvSpPr>
-            <a:spLocks noGrp="1"/>
-          </p:cNvSpPr>
-          <p:nvPr>
-            <p:ph type="title"/>
-          </p:nvPr>
-        </p:nvSpPr>
-        <p:spPr>
-          <a:xfrm>
-            <a:off x="4774063" y="2857500"/>
-            <a:ext cx="2643873" cy="1143000"/>
-          </a:xfrm>
-        </p:spPr>
-        <p:txBody>
-          <a:bodyPr/>
-          <a:lstStyle/>
-          <a:p>
-            <a:pPr algn="ctr"/>
-            <a:r>
-              <a:rPr lang="en-US" dirty="0"/>
-              <a:t>Thank You</a:t>
-            </a:r>
-            <a:endParaRPr dirty="0"/>
-          </a:p>
-        </p:txBody>
-      </p:sp>
-    </p:spTree>
-    <p:extLst>
-      <p:ext uri="{BB962C8B-B14F-4D97-AF65-F5344CB8AC3E}">
-        <p14:creationId xmlns:p14="http://schemas.microsoft.com/office/powerpoint/2010/main" val="2503925356"/>
-      </p:ext>
-    </p:extLst>
   </p:cSld>
   <p:clrMapOvr>
     <a:masterClrMapping/>
